--- a/10-Knowledge-Products/KP1-GEA/videos/module_5/en/decks/KP1_M5_5.5_Deck_v0.1.pptx
+++ b/10-Knowledge-Products/KP1-GEA/videos/module_5/en/decks/KP1_M5_5.5_Deck_v0.1.pptx
@@ -13737,73 +13737,18 @@
       </p:sp>
       <p:sp>
         <p:nvSpPr>
-          <p:cNvPr id="4" name="TextBox 3"/>
-          <p:cNvSpPr txBox="1"/>
-          <p:nvPr/>
-        </p:nvSpPr>
-        <p:spPr>
-          <a:xfrm>
-            <a:off x="658368" y="1600200"/>
-            <a:ext cx="10881360" cy="2651760"/>
-          </a:xfrm>
-          <a:prstGeom prst="rect">
-            <a:avLst/>
-          </a:prstGeom>
-          <a:noFill/>
-        </p:spPr>
-        <p:txBody>
-          <a:bodyPr wrap="square">
-            <a:spAutoFit/>
-          </a:bodyPr>
-          <a:lstStyle/>
-          <a:p>
-            <a:pPr>
-              <a:spcAft>
-                <a:spcPts val="1200"/>
-              </a:spcAft>
-            </a:pPr>
-            <a:r>
-              <a:rPr sz="2000" b="0" i="0">
-                <a:solidFill>
-                  <a:srgbClr val="1A1A1A"/>
-                </a:solidFill>
-                <a:latin typeface="Arial"/>
-              </a:rPr>
-              <a:t>You paste a real project proposal — the scholarship programme that wants its own learner list — and the AI drafts the gate questions answered, a recommended ruling and the decision-log entry.</a:t>
-            </a:r>
-          </a:p>
-          <a:p>
-            <a:pPr>
-              <a:spcAft>
-                <a:spcPts val="1200"/>
-              </a:spcAft>
-            </a:pPr>
-            <a:r>
-              <a:rPr sz="2000" b="0" i="0">
-                <a:solidFill>
-                  <a:srgbClr val="1A1A1A"/>
-                </a:solidFill>
-                <a:latin typeface="Arial"/>
-              </a:rPr>
-              <a:t>The ruling it recommends is either consume the registry, or a written exception with a sunset date and a reason.</a:t>
-            </a:r>
-          </a:p>
-        </p:txBody>
-      </p:sp>
-      <p:sp>
-        <p:nvSpPr>
-          <p:cNvPr id="5" name="Rounded Rectangle 4"/>
+          <p:cNvPr id="4" name="Rounded Rectangle 3"/>
           <p:cNvSpPr/>
           <p:nvPr/>
         </p:nvSpPr>
         <p:spPr>
           <a:xfrm>
-            <a:off x="658368" y="4434840"/>
-            <a:ext cx="10881360" cy="1325880"/>
+            <a:off x="658368" y="1645920"/>
+            <a:ext cx="3246120" cy="3840480"/>
           </a:xfrm>
           <a:prstGeom prst="roundRect">
             <a:avLst>
-              <a:gd name="adj" fmla="val 4500"/>
+              <a:gd name="adj" fmla="val 8000"/>
             </a:avLst>
           </a:prstGeom>
           <a:solidFill>
@@ -13829,23 +13774,338 @@
           </a:fontRef>
         </p:style>
         <p:txBody>
-          <a:bodyPr rtlCol="0" anchor="ctr"/>
+          <a:bodyPr rtlCol="0" anchor="t" lIns="128016" rIns="128016" tIns="91440" bIns="54864" wrap="square"/>
           <a:lstStyle/>
           <a:p>
-            <a:pPr algn="ctr"/>
-          </a:p>
-        </p:txBody>
-      </p:sp>
-      <p:sp>
-        <p:nvSpPr>
-          <p:cNvPr id="6" name="TextBox 5"/>
+            <a:pPr algn="l">
+              <a:spcAft>
+                <a:spcPts val="300"/>
+              </a:spcAft>
+            </a:pPr>
+            <a:r>
+              <a:rPr sz="1200" b="1" i="0">
+                <a:solidFill>
+                  <a:srgbClr val="006E96"/>
+                </a:solidFill>
+                <a:latin typeface="Arial"/>
+              </a:rPr>
+              <a:t>YOU PASTE</a:t>
+            </a:r>
+          </a:p>
+          <a:p>
+            <a:pPr algn="l">
+              <a:spcAft>
+                <a:spcPts val="300"/>
+              </a:spcAft>
+            </a:pPr>
+            <a:r>
+              <a:rPr sz="1450" b="0" i="0">
+                <a:solidFill>
+                  <a:srgbClr val="1A1A1A"/>
+                </a:solidFill>
+                <a:latin typeface="Arial"/>
+              </a:rPr>
+              <a:t>A real project proposal.</a:t>
+            </a:r>
+          </a:p>
+          <a:p>
+            <a:pPr algn="l">
+              <a:spcAft>
+                <a:spcPts val="300"/>
+              </a:spcAft>
+            </a:pPr>
+            <a:r>
+              <a:rPr sz="1450" b="0" i="0">
+                <a:solidFill>
+                  <a:srgbClr val="1A1A1A"/>
+                </a:solidFill>
+                <a:latin typeface="Arial"/>
+              </a:rPr>
+              <a:t>The scholarship programme that wants its own learner list.</a:t>
+            </a:r>
+          </a:p>
+        </p:txBody>
+      </p:sp>
+      <p:sp>
+        <p:nvSpPr>
+          <p:cNvPr id="5" name="Rounded Rectangle 4"/>
+          <p:cNvSpPr/>
+          <p:nvPr/>
+        </p:nvSpPr>
+        <p:spPr>
+          <a:xfrm>
+            <a:off x="4471416" y="1645920"/>
+            <a:ext cx="3246120" cy="3840480"/>
+          </a:xfrm>
+          <a:prstGeom prst="roundRect">
+            <a:avLst>
+              <a:gd name="adj" fmla="val 8000"/>
+            </a:avLst>
+          </a:prstGeom>
+          <a:solidFill>
+            <a:srgbClr val="F2F2F2"/>
+          </a:solidFill>
+          <a:ln>
+            <a:noFill/>
+          </a:ln>
+          <a:effectLst/>
+        </p:spPr>
+        <p:style>
+          <a:lnRef idx="1">
+            <a:schemeClr val="accent1"/>
+          </a:lnRef>
+          <a:fillRef idx="3">
+            <a:schemeClr val="accent1"/>
+          </a:fillRef>
+          <a:effectRef idx="2">
+            <a:schemeClr val="accent1"/>
+          </a:effectRef>
+          <a:fontRef idx="minor">
+            <a:schemeClr val="lt1"/>
+          </a:fontRef>
+        </p:style>
+        <p:txBody>
+          <a:bodyPr rtlCol="0" anchor="t" lIns="128016" rIns="128016" tIns="91440" bIns="54864" wrap="square"/>
+          <a:lstStyle/>
+          <a:p>
+            <a:pPr algn="l">
+              <a:spcAft>
+                <a:spcPts val="300"/>
+              </a:spcAft>
+            </a:pPr>
+            <a:r>
+              <a:rPr sz="1200" b="1" i="0">
+                <a:solidFill>
+                  <a:srgbClr val="006E96"/>
+                </a:solidFill>
+                <a:latin typeface="Arial"/>
+              </a:rPr>
+              <a:t>THE AI RETURNS</a:t>
+            </a:r>
+          </a:p>
+          <a:p>
+            <a:pPr algn="l">
+              <a:spcAft>
+                <a:spcPts val="300"/>
+              </a:spcAft>
+            </a:pPr>
+            <a:r>
+              <a:rPr sz="1450" b="0" i="0">
+                <a:solidFill>
+                  <a:srgbClr val="1A1A1A"/>
+                </a:solidFill>
+                <a:latin typeface="Arial"/>
+              </a:rPr>
+              <a:t>The gate questions, answered.</a:t>
+            </a:r>
+          </a:p>
+          <a:p>
+            <a:pPr algn="l">
+              <a:spcAft>
+                <a:spcPts val="300"/>
+              </a:spcAft>
+            </a:pPr>
+            <a:r>
+              <a:rPr sz="1450" b="0" i="0">
+                <a:solidFill>
+                  <a:srgbClr val="1A1A1A"/>
+                </a:solidFill>
+                <a:latin typeface="Arial"/>
+              </a:rPr>
+              <a:t>A recommended ruling.</a:t>
+            </a:r>
+          </a:p>
+          <a:p>
+            <a:pPr algn="l">
+              <a:spcAft>
+                <a:spcPts val="300"/>
+              </a:spcAft>
+            </a:pPr>
+            <a:r>
+              <a:rPr sz="1450" b="0" i="0">
+                <a:solidFill>
+                  <a:srgbClr val="1A1A1A"/>
+                </a:solidFill>
+                <a:latin typeface="Arial"/>
+              </a:rPr>
+              <a:t>The decision-log entry.</a:t>
+            </a:r>
+          </a:p>
+        </p:txBody>
+      </p:sp>
+      <p:sp>
+        <p:nvSpPr>
+          <p:cNvPr id="6" name="Rounded Rectangle 5"/>
+          <p:cNvSpPr/>
+          <p:nvPr/>
+        </p:nvSpPr>
+        <p:spPr>
+          <a:xfrm>
+            <a:off x="8284464" y="1645920"/>
+            <a:ext cx="3246120" cy="3840480"/>
+          </a:xfrm>
+          <a:prstGeom prst="roundRect">
+            <a:avLst>
+              <a:gd name="adj" fmla="val 8000"/>
+            </a:avLst>
+          </a:prstGeom>
+          <a:solidFill>
+            <a:srgbClr val="006E96"/>
+          </a:solidFill>
+          <a:ln>
+            <a:noFill/>
+          </a:ln>
+          <a:effectLst/>
+        </p:spPr>
+        <p:style>
+          <a:lnRef idx="1">
+            <a:schemeClr val="accent1"/>
+          </a:lnRef>
+          <a:fillRef idx="3">
+            <a:schemeClr val="accent1"/>
+          </a:fillRef>
+          <a:effectRef idx="2">
+            <a:schemeClr val="accent1"/>
+          </a:effectRef>
+          <a:fontRef idx="minor">
+            <a:schemeClr val="lt1"/>
+          </a:fontRef>
+        </p:style>
+        <p:txBody>
+          <a:bodyPr rtlCol="0" anchor="t" lIns="128016" rIns="128016" tIns="91440" bIns="54864" wrap="square"/>
+          <a:lstStyle/>
+          <a:p>
+            <a:pPr algn="l">
+              <a:spcAft>
+                <a:spcPts val="300"/>
+              </a:spcAft>
+            </a:pPr>
+            <a:r>
+              <a:rPr sz="1200" b="1" i="0">
+                <a:solidFill>
+                  <a:srgbClr val="FFFFFF"/>
+                </a:solidFill>
+                <a:latin typeface="Arial"/>
+              </a:rPr>
+              <a:t>YOU DECIDE</a:t>
+            </a:r>
+          </a:p>
+          <a:p>
+            <a:pPr algn="l">
+              <a:spcAft>
+                <a:spcPts val="300"/>
+              </a:spcAft>
+            </a:pPr>
+            <a:r>
+              <a:rPr sz="1450" b="0" i="0">
+                <a:solidFill>
+                  <a:srgbClr val="FFFFFF"/>
+                </a:solidFill>
+                <a:latin typeface="Arial"/>
+              </a:rPr>
+              <a:t>The Board rules.</a:t>
+            </a:r>
+          </a:p>
+          <a:p>
+            <a:pPr algn="l">
+              <a:spcAft>
+                <a:spcPts val="300"/>
+              </a:spcAft>
+            </a:pPr>
+            <a:r>
+              <a:rPr sz="1450" b="0" i="0">
+                <a:solidFill>
+                  <a:srgbClr val="FFFFFF"/>
+                </a:solidFill>
+                <a:latin typeface="Arial"/>
+              </a:rPr>
+              <a:t>Consume the registry, or a time-boxed written exception.</a:t>
+            </a:r>
+          </a:p>
+        </p:txBody>
+      </p:sp>
+      <p:cxnSp>
+        <p:nvCxnSpPr>
+          <p:cNvPr id="7" name="Connector 6"/>
+          <p:cNvCxnSpPr/>
+          <p:nvPr/>
+        </p:nvCxnSpPr>
+        <p:spPr>
+          <a:xfrm>
+            <a:off x="3977639" y="3566160"/>
+            <a:ext cx="420625" cy="0"/>
+          </a:xfrm>
+          <a:prstGeom prst="line">
+            <a:avLst/>
+          </a:prstGeom>
+          <a:ln w="25400">
+            <a:solidFill>
+              <a:srgbClr val="006E96"/>
+            </a:solidFill>
+            <a:tailEnd type="triangle" w="med" len="med"/>
+          </a:ln>
+        </p:spPr>
+        <p:style>
+          <a:lnRef idx="2">
+            <a:schemeClr val="accent1"/>
+          </a:lnRef>
+          <a:fillRef idx="0">
+            <a:schemeClr val="accent1"/>
+          </a:fillRef>
+          <a:effectRef idx="1">
+            <a:schemeClr val="accent1"/>
+          </a:effectRef>
+          <a:fontRef idx="minor">
+            <a:schemeClr val="tx1"/>
+          </a:fontRef>
+        </p:style>
+      </p:cxnSp>
+      <p:cxnSp>
+        <p:nvCxnSpPr>
+          <p:cNvPr id="8" name="Connector 7"/>
+          <p:cNvCxnSpPr/>
+          <p:nvPr/>
+        </p:nvCxnSpPr>
+        <p:spPr>
+          <a:xfrm>
+            <a:off x="7790688" y="3566160"/>
+            <a:ext cx="420624" cy="0"/>
+          </a:xfrm>
+          <a:prstGeom prst="line">
+            <a:avLst/>
+          </a:prstGeom>
+          <a:ln w="25400">
+            <a:solidFill>
+              <a:srgbClr val="006E96"/>
+            </a:solidFill>
+            <a:tailEnd type="triangle" w="med" len="med"/>
+          </a:ln>
+        </p:spPr>
+        <p:style>
+          <a:lnRef idx="2">
+            <a:schemeClr val="accent1"/>
+          </a:lnRef>
+          <a:fillRef idx="0">
+            <a:schemeClr val="accent1"/>
+          </a:fillRef>
+          <a:effectRef idx="1">
+            <a:schemeClr val="accent1"/>
+          </a:effectRef>
+          <a:fontRef idx="minor">
+            <a:schemeClr val="tx1"/>
+          </a:fontRef>
+        </p:style>
+      </p:cxnSp>
+      <p:sp>
+        <p:nvSpPr>
+          <p:cNvPr id="9" name="TextBox 8"/>
           <p:cNvSpPr txBox="1"/>
           <p:nvPr/>
         </p:nvSpPr>
         <p:spPr>
           <a:xfrm>
-            <a:off x="859536" y="4626864"/>
-            <a:ext cx="10479024" cy="1051560"/>
+            <a:off x="658368" y="5760720"/>
+            <a:ext cx="10881360" cy="548640"/>
           </a:xfrm>
           <a:prstGeom prst="rect">
             <a:avLst/>
@@ -13858,13 +14118,8 @@
           </a:bodyPr>
           <a:lstStyle/>
           <a:p>
-            <a:pPr>
-              <a:spcAft>
-                <a:spcPts val="700"/>
-              </a:spcAft>
-            </a:pPr>
-            <a:r>
-              <a:rPr sz="2300" b="1" i="0">
+            <a:r>
+              <a:rPr sz="1550" b="1" i="0">
                 <a:solidFill>
                   <a:srgbClr val="006E96"/>
                 </a:solidFill>
@@ -13877,7 +14132,7 @@
       </p:sp>
       <p:sp>
         <p:nvSpPr>
-          <p:cNvPr id="7" name="TextBox 6"/>
+          <p:cNvPr id="10" name="TextBox 9"/>
           <p:cNvSpPr txBox="1"/>
           <p:nvPr/>
         </p:nvSpPr>
@@ -14014,7 +14269,7 @@
         <p:spPr>
           <a:xfrm>
             <a:off x="658368" y="1600200"/>
-            <a:ext cx="10881360" cy="2651760"/>
+            <a:ext cx="10881360" cy="1984248"/>
           </a:xfrm>
           <a:prstGeom prst="rect">
             <a:avLst/>
@@ -14068,7 +14323,7 @@
         </p:nvSpPr>
         <p:spPr>
           <a:xfrm>
-            <a:off x="658368" y="4434840"/>
+            <a:off x="658368" y="3767328"/>
             <a:ext cx="10881360" cy="1325880"/>
           </a:xfrm>
           <a:prstGeom prst="roundRect">
@@ -14114,7 +14369,7 @@
         </p:nvSpPr>
         <p:spPr>
           <a:xfrm>
-            <a:off x="859536" y="4626864"/>
+            <a:off x="859536" y="3959352"/>
             <a:ext cx="10479024" cy="1051560"/>
           </a:xfrm>
           <a:prstGeom prst="rect">

--- a/10-Knowledge-Products/KP1-GEA/videos/module_5/en/decks/KP1_M5_5.5_Deck_v0.1.pptx
+++ b/10-Knowledge-Products/KP1-GEA/videos/module_5/en/decks/KP1_M5_5.5_Deck_v0.1.pptx
@@ -1003,13 +1003,13 @@
           <a:lstStyle/>
           <a:p>
             <a:r>
-              <a:t>VO, slide 1: The fourth play drafts the documents that make governance real — and that architects most dread starting. A Board terms of reference. A review-gate checklist. A gate-decision paper for a specific project. These are formal, structured, and slow to write from scratch. The play gets you a strong draft to edit.</a:t>
+              <a:t>VO, slide 1: One worry that stops strategists committing is capability: do we have the people who can do this, and can we afford to train them? The reassuring answer is that you do not have to build the knowledge from scratch. The method, the framework and the training materials already exist as open knowledge products — which changes what you actually need to fund.</a:t>
             </a:r>
           </a:p>
           <a:p/>
           <a:p>
             <a:r>
-              <a:t>On screen: the play's copy-paste prompt is not shown on a slide — it ships in the video description so the viewer can run it on the other half of the screen.</a:t>
+              <a:t>On screen: the copy-paste prompt is not shown on a slide — it ships in the video description so the viewer can draft the artefact on the other half of the screen.</a:t>
             </a:r>
           </a:p>
         </p:txBody>
@@ -1079,7 +1079,7 @@
           <a:lstStyle/>
           <a:p>
             <a:r>
-              <a:t>VO: First, the Board terms of reference. You give the AI your country's relevant roles — the digitalisation officer, the sector CIOs, the registry owners, the data-protection regulator. It drafts a terms of reference with the parts that matter: the purpose, the binding decision scope spelled out as specific decision types, the membership, the cadence, the reporting line, the escalation path. You get a one-to-two-page institutional document to take to the chair, instead of a blank page and a deadline.</a:t>
+              <a:t>VO: The method is not locked in a consultant's head. The reference architecture is published. The building-block specifications are open. And the knowledge products — videos, written guides, worked examples, the very materials this is part of — are made to teach a practising architect the method step by step. Your team does not start from a blank page. They start from a documented method that other countries are already using, which means your training cost is a fraction of what building the knowledge yourself would be.</a:t>
             </a:r>
           </a:p>
         </p:txBody>
@@ -1149,7 +1149,7 @@
           <a:lstStyle/>
           <a:p>
             <a:r>
-              <a:t>VO: Second, the review-gate checklist — the questions every project answers before funding. You give it your adopted principles and the shared building blocks you have. It drafts the intake questions, what a pass looks like for each, an exception form with a sunset date, and the fields for the decision log. This is the operational heart of governance, and the play gives you a working draft of it in minutes.</a:t>
+              <a:t>VO: Think of the capability as three layers you can draw on rather than build. The published framework tells your team what to do — the phases, the principles, the deliverables. The worked examples and the AI plays show them how to do it faster — turning a method into a draft in minutes. And the community — the countries, the partners, the certification and the shared knowledge base around the framework — tells them who to ask when they are stuck. You are not equipping your team alone. You are connecting them to a network that is already solving these problems.</a:t>
             </a:r>
           </a:p>
         </p:txBody>
@@ -1219,7 +1219,7 @@
           <a:lstStyle/>
           <a:p>
             <a:r>
-              <a:t>VO: Third, the gate-decision paper for a real project. You paste a project proposal — the scholarship programme that wants its own learner list — and the AI drafts the gate questions answered, a recommended ruling, consume the registry or a time-boxed exception, and the decision-log entry. You arrive at the Board with a prepared paper. The Board still rules — but it rules on a clear, structured recommendation instead of an argument made on the spot.</a:t>
+              <a:t>VO: So what do you actually need to fund? Not the invention of a method — that exists. You need a small team given the time to learn it and apply it to your country, and access to the materials and the community. The expensive thing — the decades of accumulated knowledge about what works in public-sector architecture — you get for the cost of learning it, not the cost of discovering it. That is the difference between funding a team to apply a proven method and funding consultants to invent one. The first is affordable and builds lasting capability in your own people; the second is neither.</a:t>
             </a:r>
           </a:p>
         </p:txBody>
@@ -1289,13 +1289,13 @@
           <a:lstStyle/>
           <a:p>
             <a:r>
-              <a:t>VO: One firm caution with this play. The documents it drafts are institutional, and some of them — especially the Board's binding decision scope — interact with your country's laws. The AI draft is a starting point for your legal counsel, never the final text. A Board that claims authority it does not legally hold will be overruled the first time a powerful ministry tests it, and that overrule sets a precedent that is hard to undo. Draft fast with the play; ratify slowly, with counsel.</a:t>
+              <a:t>VO: And aim the capability at your own people, not at a consultancy you will depend on forever. The reason to use open knowledge products is not only that they are cheaper. It is that they let you build the capability inside your own institutions — architects who learn the method, apply it, and stay, instead of expertise that walks out the door when a contract ends. A strategist's quiet goal in all of this is a national capability that outlasts any single contract or consultant. Open knowledge products are how you build it in your own people.</a:t>
             </a:r>
           </a:p>
           <a:p/>
           <a:p>
             <a:r>
-              <a:t>Production cue: the operative beat of this video. Hold it a beat longer.</a:t>
+              <a:t>Production cue: the pivotal slide of this video. Hold it a beat longer.</a:t>
             </a:r>
           </a:p>
         </p:txBody>
@@ -1365,7 +1365,7 @@
           <a:lstStyle/>
           <a:p>
             <a:r>
-              <a:t>VO: So the fourth play drafts the institutional documents governance needs. The terms of reference, the review-gate checklist, the gate-decision paper. Use it to skip the dread of the blank page — and route every document that touches authority through your legal counsel before it is adopted.</a:t>
+              <a:t>VO: So capability is not the barrier it appears to be. The knowledge is documented, open and taught; a community is already using it; and your budget goes to a team that applies it, not to reinventing it. Use the open knowledge products to grow your own architects — and you build something that lasts longer than any contract.</a:t>
             </a:r>
           </a:p>
         </p:txBody>
@@ -11710,7 +11710,7 @@
                 </a:solidFill>
                 <a:latin typeface="Arial"/>
               </a:rPr>
-              <a:t>5.5 — Play 4 — Draft your governance artefacts</a:t>
+              <a:t>5.5 — Build your team's capability with open knowledge products</a:t>
             </a:r>
           </a:p>
         </p:txBody>
@@ -11826,7 +11826,7 @@
                 </a:solidFill>
                 <a:latin typeface="Arial"/>
               </a:rPr>
-              <a:t>The fourth play drafts the institutional documents governance needs — the Board terms of reference, the review-gate checklist, the gate-decision paper — so you arrive at the meeting with a strong draft to edit, not a blank page to dread.</a:t>
+              <a:t>You do not have to train your team from scratch — open knowledge products, a shared framework, and a community of practising countries mean your people can learn the method from materials that already exist, freeing your budget for the work itself.</a:t>
             </a:r>
           </a:p>
         </p:txBody>
@@ -11923,7 +11923,7 @@
                 </a:solidFill>
                 <a:latin typeface="Arial"/>
               </a:rPr>
-              <a:t>Chief architect · senior architect · sector ICT lead</a:t>
+              <a:t>Director-general · head of a sectoral ICT unit · technical secretary</a:t>
             </a:r>
           </a:p>
         </p:txBody>
@@ -12001,7 +12001,7 @@
                 </a:solidFill>
                 <a:latin typeface="Arial"/>
               </a:rPr>
-              <a:t>THE FIVE PLAYS THIS MODULE TEACHES</a:t>
+              <a:t>THE CASE YOU CARRY INTO THE ROOM</a:t>
             </a:r>
           </a:p>
         </p:txBody>
@@ -12056,7 +12056,7 @@
                 </a:solidFill>
                 <a:latin typeface="Arial"/>
               </a:rPr>
-              <a:t>Play 1 — Discovery and Assess</a:t>
+              <a:t>Proven — four real governments</a:t>
             </a:r>
           </a:p>
         </p:txBody>
@@ -12111,7 +12111,7 @@
                 </a:solidFill>
                 <a:latin typeface="Arial"/>
               </a:rPr>
-              <a:t>Play 2 — the re-use business case</a:t>
+              <a:t>Portable — sector after sector</a:t>
             </a:r>
           </a:p>
         </p:txBody>
@@ -12166,7 +12166,7 @@
                 </a:solidFill>
                 <a:latin typeface="Arial"/>
               </a:rPr>
-              <a:t>Play 3 — minister and architects</a:t>
+              <a:t>The commitment — the one page</a:t>
             </a:r>
           </a:p>
         </p:txBody>
@@ -12221,7 +12221,7 @@
                 </a:solidFill>
                 <a:latin typeface="Arial"/>
               </a:rPr>
-              <a:t>Play 4 — the governance artefacts</a:t>
+              <a:t>The capability — your own people</a:t>
             </a:r>
           </a:p>
         </p:txBody>
@@ -12276,7 +12276,7 @@
                 </a:solidFill>
                 <a:latin typeface="Arial"/>
               </a:rPr>
-              <a:t>Play 5 — comparators and transfer</a:t>
+              <a:t>Necessary now, not just useful</a:t>
             </a:r>
           </a:p>
         </p:txBody>
@@ -12310,7 +12310,7 @@
                 </a:solidFill>
                 <a:latin typeface="Arial"/>
               </a:rPr>
-              <a:t>4-part prompt · 5 plays · 4 safeguards · you decide, the AI drafts</a:t>
+              <a:t>4 governments · 4 killers to design out · 1 page for the minister</a:t>
             </a:r>
           </a:p>
         </p:txBody>
@@ -12435,7 +12435,7 @@
                 </a:solidFill>
                 <a:latin typeface="Arial"/>
               </a:rPr>
-              <a:t>Play 4 — Draft your governance artefacts</a:t>
+              <a:t>Build your team's capability with open knowledge products</a:t>
             </a:r>
           </a:p>
         </p:txBody>
@@ -12469,7 +12469,7 @@
                 </a:solidFill>
                 <a:latin typeface="Arial"/>
               </a:rPr>
-              <a:t>The fourth play drafts the institutional documents governance needs — the Board terms of reference, the review-gate checklist, the gate-decision paper — so you arrive at the meeting with a strong draft to edit, not a blank page to dread.</a:t>
+              <a:t>You do not have to train your team from scratch — open knowledge products, a shared framework, and a community of practising countries mean your people can learn the method from materials that already exist, freeing your budget for the work itself.</a:t>
             </a:r>
           </a:p>
         </p:txBody>
@@ -12599,7 +12599,7 @@
                 </a:solidFill>
                 <a:latin typeface="Arial"/>
               </a:rPr>
-              <a:t>The Board terms of reference — the one-to-two pages you take to the chair</a:t>
+              <a:t>The method is not locked in a consultant's head</a:t>
             </a:r>
           </a:p>
         </p:txBody>
@@ -12612,8 +12612,8 @@
         </p:nvSpPr>
         <p:spPr>
           <a:xfrm>
-            <a:off x="658368" y="1417320"/>
-            <a:ext cx="10984687" cy="832103"/>
+            <a:off x="658368" y="1600200"/>
+            <a:ext cx="10881360" cy="2651760"/>
           </a:xfrm>
           <a:prstGeom prst="rect">
             <a:avLst/>
@@ -12628,53 +12628,55 @@
           <a:p>
             <a:pPr>
               <a:spcAft>
-                <a:spcPts val="300"/>
+                <a:spcPts val="1200"/>
               </a:spcAft>
             </a:pPr>
             <a:r>
-              <a:rPr sz="1700" b="1" i="0">
+              <a:rPr sz="2000" b="0" i="0">
                 <a:solidFill>
                   <a:srgbClr val="1A1A1A"/>
                 </a:solidFill>
                 <a:latin typeface="Arial"/>
               </a:rPr>
-              <a:t>Purpose</a:t>
+              <a:t>The reference architecture is published. The building-block specifications are open. The knowledge products — videos, written guides, worked examples — are made to teach a practising architect the method step by step.</a:t>
             </a:r>
           </a:p>
           <a:p>
             <a:pPr>
               <a:spcAft>
-                <a:spcPts val="300"/>
+                <a:spcPts val="1200"/>
               </a:spcAft>
             </a:pPr>
             <a:r>
-              <a:rPr sz="1550" b="0" i="0">
+              <a:rPr sz="2000" b="0" i="0">
                 <a:solidFill>
-                  <a:srgbClr val="595959"/>
+                  <a:srgbClr val="1A1A1A"/>
                 </a:solidFill>
                 <a:latin typeface="Arial"/>
               </a:rPr>
-              <a:t>What the Board is for, in one paragraph.</a:t>
-            </a:r>
-          </a:p>
-        </p:txBody>
-      </p:sp>
-      <p:sp>
-        <p:nvSpPr>
-          <p:cNvPr id="5" name="Rectangle 4"/>
+              <a:t>Your team does not start from a blank page. They start from a documented method that other countries are already using.</a:t>
+            </a:r>
+          </a:p>
+        </p:txBody>
+      </p:sp>
+      <p:sp>
+        <p:nvSpPr>
+          <p:cNvPr id="5" name="Rounded Rectangle 4"/>
           <p:cNvSpPr/>
           <p:nvPr/>
         </p:nvSpPr>
         <p:spPr>
           <a:xfrm>
-            <a:off x="621792" y="2253996"/>
-            <a:ext cx="10881360" cy="12700"/>
-          </a:xfrm>
-          <a:prstGeom prst="rect">
-            <a:avLst/>
+            <a:off x="658368" y="4434840"/>
+            <a:ext cx="10881360" cy="1325880"/>
+          </a:xfrm>
+          <a:prstGeom prst="roundRect">
+            <a:avLst>
+              <a:gd name="adj" fmla="val 4500"/>
+            </a:avLst>
           </a:prstGeom>
           <a:solidFill>
-            <a:srgbClr val="DDECF4"/>
+            <a:srgbClr val="E5F5FB"/>
           </a:solidFill>
           <a:ln>
             <a:noFill/>
@@ -12711,8 +12713,8 @@
         </p:nvSpPr>
         <p:spPr>
           <a:xfrm>
-            <a:off x="658368" y="2295144"/>
-            <a:ext cx="10984687" cy="832103"/>
+            <a:off x="859536" y="4626864"/>
+            <a:ext cx="10479024" cy="1051560"/>
           </a:xfrm>
           <a:prstGeom prst="rect">
             <a:avLst/>
@@ -12727,371 +12729,24 @@
           <a:p>
             <a:pPr>
               <a:spcAft>
-                <a:spcPts val="300"/>
+                <a:spcPts val="700"/>
               </a:spcAft>
             </a:pPr>
             <a:r>
-              <a:rPr sz="1700" b="1" i="0">
-                <a:solidFill>
-                  <a:srgbClr val="1A1A1A"/>
-                </a:solidFill>
-                <a:latin typeface="Arial"/>
-              </a:rPr>
-              <a:t>Binding decision scope</a:t>
-            </a:r>
-          </a:p>
-          <a:p>
-            <a:pPr>
-              <a:spcAft>
-                <a:spcPts val="300"/>
-              </a:spcAft>
-            </a:pPr>
-            <a:r>
-              <a:rPr sz="1550" b="0" i="0">
-                <a:solidFill>
-                  <a:srgbClr val="595959"/>
-                </a:solidFill>
-                <a:latin typeface="Arial"/>
-              </a:rPr>
-              <a:t>Spelled out as specific decision types — not "provides guidance".</a:t>
-            </a:r>
-          </a:p>
-        </p:txBody>
-      </p:sp>
-      <p:sp>
-        <p:nvSpPr>
-          <p:cNvPr id="7" name="Rectangle 6"/>
-          <p:cNvSpPr/>
-          <p:nvPr/>
-        </p:nvSpPr>
-        <p:spPr>
-          <a:xfrm>
-            <a:off x="621792" y="3131820"/>
-            <a:ext cx="10881360" cy="12700"/>
-          </a:xfrm>
-          <a:prstGeom prst="rect">
-            <a:avLst/>
-          </a:prstGeom>
-          <a:solidFill>
-            <a:srgbClr val="DDECF4"/>
-          </a:solidFill>
-          <a:ln>
-            <a:noFill/>
-          </a:ln>
-          <a:effectLst/>
-        </p:spPr>
-        <p:style>
-          <a:lnRef idx="1">
-            <a:schemeClr val="accent1"/>
-          </a:lnRef>
-          <a:fillRef idx="3">
-            <a:schemeClr val="accent1"/>
-          </a:fillRef>
-          <a:effectRef idx="2">
-            <a:schemeClr val="accent1"/>
-          </a:effectRef>
-          <a:fontRef idx="minor">
-            <a:schemeClr val="lt1"/>
-          </a:fontRef>
-        </p:style>
-        <p:txBody>
-          <a:bodyPr rtlCol="0" anchor="ctr"/>
-          <a:lstStyle/>
-          <a:p>
-            <a:pPr algn="ctr"/>
-          </a:p>
-        </p:txBody>
-      </p:sp>
-      <p:sp>
-        <p:nvSpPr>
-          <p:cNvPr id="8" name="TextBox 7"/>
-          <p:cNvSpPr txBox="1"/>
-          <p:nvPr/>
-        </p:nvSpPr>
-        <p:spPr>
-          <a:xfrm>
-            <a:off x="658368" y="3172968"/>
-            <a:ext cx="10984687" cy="832103"/>
-          </a:xfrm>
-          <a:prstGeom prst="rect">
-            <a:avLst/>
-          </a:prstGeom>
-          <a:noFill/>
-        </p:spPr>
-        <p:txBody>
-          <a:bodyPr wrap="square">
-            <a:spAutoFit/>
-          </a:bodyPr>
-          <a:lstStyle/>
-          <a:p>
-            <a:pPr>
-              <a:spcAft>
-                <a:spcPts val="300"/>
-              </a:spcAft>
-            </a:pPr>
-            <a:r>
-              <a:rPr sz="1700" b="1" i="0">
-                <a:solidFill>
-                  <a:srgbClr val="1A1A1A"/>
-                </a:solidFill>
-                <a:latin typeface="Arial"/>
-              </a:rPr>
-              <a:t>Membership</a:t>
-            </a:r>
-          </a:p>
-          <a:p>
-            <a:pPr>
-              <a:spcAft>
-                <a:spcPts val="300"/>
-              </a:spcAft>
-            </a:pPr>
-            <a:r>
-              <a:rPr sz="1550" b="0" i="0">
-                <a:solidFill>
-                  <a:srgbClr val="595959"/>
-                </a:solidFill>
-                <a:latin typeface="Arial"/>
-              </a:rPr>
-              <a:t>The digitalisation officer, the sector CIOs, the registry owners, the data-protection regulator.</a:t>
-            </a:r>
-          </a:p>
-        </p:txBody>
-      </p:sp>
-      <p:sp>
-        <p:nvSpPr>
-          <p:cNvPr id="9" name="Rectangle 8"/>
-          <p:cNvSpPr/>
-          <p:nvPr/>
-        </p:nvSpPr>
-        <p:spPr>
-          <a:xfrm>
-            <a:off x="621792" y="4009644"/>
-            <a:ext cx="10881360" cy="12700"/>
-          </a:xfrm>
-          <a:prstGeom prst="rect">
-            <a:avLst/>
-          </a:prstGeom>
-          <a:solidFill>
-            <a:srgbClr val="DDECF4"/>
-          </a:solidFill>
-          <a:ln>
-            <a:noFill/>
-          </a:ln>
-          <a:effectLst/>
-        </p:spPr>
-        <p:style>
-          <a:lnRef idx="1">
-            <a:schemeClr val="accent1"/>
-          </a:lnRef>
-          <a:fillRef idx="3">
-            <a:schemeClr val="accent1"/>
-          </a:fillRef>
-          <a:effectRef idx="2">
-            <a:schemeClr val="accent1"/>
-          </a:effectRef>
-          <a:fontRef idx="minor">
-            <a:schemeClr val="lt1"/>
-          </a:fontRef>
-        </p:style>
-        <p:txBody>
-          <a:bodyPr rtlCol="0" anchor="ctr"/>
-          <a:lstStyle/>
-          <a:p>
-            <a:pPr algn="ctr"/>
-          </a:p>
-        </p:txBody>
-      </p:sp>
-      <p:sp>
-        <p:nvSpPr>
-          <p:cNvPr id="10" name="TextBox 9"/>
-          <p:cNvSpPr txBox="1"/>
-          <p:nvPr/>
-        </p:nvSpPr>
-        <p:spPr>
-          <a:xfrm>
-            <a:off x="658368" y="4050791"/>
-            <a:ext cx="10984687" cy="832103"/>
-          </a:xfrm>
-          <a:prstGeom prst="rect">
-            <a:avLst/>
-          </a:prstGeom>
-          <a:noFill/>
-        </p:spPr>
-        <p:txBody>
-          <a:bodyPr wrap="square">
-            <a:spAutoFit/>
-          </a:bodyPr>
-          <a:lstStyle/>
-          <a:p>
-            <a:pPr>
-              <a:spcAft>
-                <a:spcPts val="300"/>
-              </a:spcAft>
-            </a:pPr>
-            <a:r>
-              <a:rPr sz="1700" b="1" i="0">
-                <a:solidFill>
-                  <a:srgbClr val="1A1A1A"/>
-                </a:solidFill>
-                <a:latin typeface="Arial"/>
-              </a:rPr>
-              <a:t>Cadence and reporting line</a:t>
-            </a:r>
-          </a:p>
-          <a:p>
-            <a:pPr>
-              <a:spcAft>
-                <a:spcPts val="300"/>
-              </a:spcAft>
-            </a:pPr>
-            <a:r>
-              <a:rPr sz="1550" b="0" i="0">
-                <a:solidFill>
-                  <a:srgbClr val="595959"/>
-                </a:solidFill>
-                <a:latin typeface="Arial"/>
-              </a:rPr>
-              <a:t>How often it meets, and who it reports to.</a:t>
-            </a:r>
-          </a:p>
-        </p:txBody>
-      </p:sp>
-      <p:sp>
-        <p:nvSpPr>
-          <p:cNvPr id="11" name="Rectangle 10"/>
-          <p:cNvSpPr/>
-          <p:nvPr/>
-        </p:nvSpPr>
-        <p:spPr>
-          <a:xfrm>
-            <a:off x="621792" y="4887468"/>
-            <a:ext cx="10881360" cy="12700"/>
-          </a:xfrm>
-          <a:prstGeom prst="rect">
-            <a:avLst/>
-          </a:prstGeom>
-          <a:solidFill>
-            <a:srgbClr val="DDECF4"/>
-          </a:solidFill>
-          <a:ln>
-            <a:noFill/>
-          </a:ln>
-          <a:effectLst/>
-        </p:spPr>
-        <p:style>
-          <a:lnRef idx="1">
-            <a:schemeClr val="accent1"/>
-          </a:lnRef>
-          <a:fillRef idx="3">
-            <a:schemeClr val="accent1"/>
-          </a:fillRef>
-          <a:effectRef idx="2">
-            <a:schemeClr val="accent1"/>
-          </a:effectRef>
-          <a:fontRef idx="minor">
-            <a:schemeClr val="lt1"/>
-          </a:fontRef>
-        </p:style>
-        <p:txBody>
-          <a:bodyPr rtlCol="0" anchor="ctr"/>
-          <a:lstStyle/>
-          <a:p>
-            <a:pPr algn="ctr"/>
-          </a:p>
-        </p:txBody>
-      </p:sp>
-      <p:sp>
-        <p:nvSpPr>
-          <p:cNvPr id="12" name="TextBox 11"/>
-          <p:cNvSpPr txBox="1"/>
-          <p:nvPr/>
-        </p:nvSpPr>
-        <p:spPr>
-          <a:xfrm>
-            <a:off x="658368" y="4928616"/>
-            <a:ext cx="10984687" cy="832103"/>
-          </a:xfrm>
-          <a:prstGeom prst="rect">
-            <a:avLst/>
-          </a:prstGeom>
-          <a:noFill/>
-        </p:spPr>
-        <p:txBody>
-          <a:bodyPr wrap="square">
-            <a:spAutoFit/>
-          </a:bodyPr>
-          <a:lstStyle/>
-          <a:p>
-            <a:pPr>
-              <a:spcAft>
-                <a:spcPts val="300"/>
-              </a:spcAft>
-            </a:pPr>
-            <a:r>
-              <a:rPr sz="1700" b="1" i="0">
-                <a:solidFill>
-                  <a:srgbClr val="1A1A1A"/>
-                </a:solidFill>
-                <a:latin typeface="Arial"/>
-              </a:rPr>
-              <a:t>Escalation path</a:t>
-            </a:r>
-          </a:p>
-          <a:p>
-            <a:pPr>
-              <a:spcAft>
-                <a:spcPts val="300"/>
-              </a:spcAft>
-            </a:pPr>
-            <a:r>
-              <a:rPr sz="1550" b="0" i="0">
-                <a:solidFill>
-                  <a:srgbClr val="595959"/>
-                </a:solidFill>
-                <a:latin typeface="Arial"/>
-              </a:rPr>
-              <a:t>What happens when a body refuses a ruling.</a:t>
-            </a:r>
-          </a:p>
-        </p:txBody>
-      </p:sp>
-      <p:sp>
-        <p:nvSpPr>
-          <p:cNvPr id="13" name="TextBox 12"/>
-          <p:cNvSpPr txBox="1"/>
-          <p:nvPr/>
-        </p:nvSpPr>
-        <p:spPr>
-          <a:xfrm>
-            <a:off x="658368" y="5916168"/>
-            <a:ext cx="10881360" cy="548640"/>
-          </a:xfrm>
-          <a:prstGeom prst="rect">
-            <a:avLst/>
-          </a:prstGeom>
-          <a:noFill/>
-        </p:spPr>
-        <p:txBody>
-          <a:bodyPr wrap="square">
-            <a:spAutoFit/>
-          </a:bodyPr>
-          <a:lstStyle/>
-          <a:p>
-            <a:r>
-              <a:rPr sz="1550" b="1" i="0">
+              <a:rPr sz="2300" b="1" i="0">
                 <a:solidFill>
                   <a:srgbClr val="006E96"/>
                 </a:solidFill>
                 <a:latin typeface="Arial"/>
               </a:rPr>
-              <a:t>Give it your country's roles; get a draft instead of a blank page and a deadline.</a:t>
-            </a:r>
-          </a:p>
-        </p:txBody>
-      </p:sp>
-      <p:sp>
-        <p:nvSpPr>
-          <p:cNvPr id="14" name="TextBox 13"/>
+              <a:t>Your training cost is a fraction of building the knowledge yourself.</a:t>
+            </a:r>
+          </a:p>
+        </p:txBody>
+      </p:sp>
+      <p:sp>
+        <p:nvSpPr>
+          <p:cNvPr id="7" name="TextBox 6"/>
           <p:cNvSpPr txBox="1"/>
           <p:nvPr/>
         </p:nvSpPr>
@@ -13118,7 +12773,7 @@
                 </a:solidFill>
                 <a:latin typeface="Arial"/>
               </a:rPr>
-              <a:t>5.5 · Play 4 — Draft your governance artefacts</a:t>
+              <a:t>5.5 · Build your team's capability with open knowledge products</a:t>
             </a:r>
           </a:p>
         </p:txBody>
@@ -13214,82 +12869,27 @@
                 </a:solidFill>
                 <a:latin typeface="Arial"/>
               </a:rPr>
-              <a:t>The review-gate checklist — the operational heart of governance</a:t>
-            </a:r>
-          </a:p>
-        </p:txBody>
-      </p:sp>
-      <p:sp>
-        <p:nvSpPr>
-          <p:cNvPr id="4" name="TextBox 3"/>
-          <p:cNvSpPr txBox="1"/>
-          <p:nvPr/>
-        </p:nvSpPr>
-        <p:spPr>
-          <a:xfrm>
-            <a:off x="658368" y="1463040"/>
-            <a:ext cx="10984687" cy="1028699"/>
-          </a:xfrm>
-          <a:prstGeom prst="rect">
-            <a:avLst/>
-          </a:prstGeom>
-          <a:noFill/>
-        </p:spPr>
-        <p:txBody>
-          <a:bodyPr wrap="square">
-            <a:spAutoFit/>
-          </a:bodyPr>
-          <a:lstStyle/>
-          <a:p>
-            <a:pPr>
-              <a:spcAft>
-                <a:spcPts val="300"/>
-              </a:spcAft>
-            </a:pPr>
-            <a:r>
-              <a:rPr sz="1900" b="1" i="0">
-                <a:solidFill>
-                  <a:srgbClr val="1A1A1A"/>
-                </a:solidFill>
-                <a:latin typeface="Arial"/>
-              </a:rPr>
-              <a:t>The intake questions</a:t>
-            </a:r>
-          </a:p>
-          <a:p>
-            <a:pPr>
-              <a:spcAft>
-                <a:spcPts val="300"/>
-              </a:spcAft>
-            </a:pPr>
-            <a:r>
-              <a:rPr sz="1550" b="0" i="0">
-                <a:solidFill>
-                  <a:srgbClr val="595959"/>
-                </a:solidFill>
-                <a:latin typeface="Arial"/>
-              </a:rPr>
-              <a:t>What every project answers before funding.</a:t>
-            </a:r>
-          </a:p>
-        </p:txBody>
-      </p:sp>
-      <p:sp>
-        <p:nvSpPr>
-          <p:cNvPr id="5" name="Rectangle 4"/>
+              <a:t>Three layers you draw on rather than build</a:t>
+            </a:r>
+          </a:p>
+        </p:txBody>
+      </p:sp>
+      <p:sp>
+        <p:nvSpPr>
+          <p:cNvPr id="4" name="Oval 3"/>
           <p:cNvSpPr/>
           <p:nvPr/>
         </p:nvSpPr>
         <p:spPr>
           <a:xfrm>
-            <a:off x="621792" y="2496312"/>
-            <a:ext cx="10881360" cy="12700"/>
-          </a:xfrm>
-          <a:prstGeom prst="rect">
+            <a:off x="621792" y="1508760"/>
+            <a:ext cx="310896" cy="310896"/>
+          </a:xfrm>
+          <a:prstGeom prst="ellipse">
             <a:avLst/>
           </a:prstGeom>
           <a:solidFill>
-            <a:srgbClr val="DDECF4"/>
+            <a:srgbClr val="009CD6"/>
           </a:solidFill>
           <a:ln>
             <a:noFill/>
@@ -13311,23 +12911,32 @@
           </a:fontRef>
         </p:style>
         <p:txBody>
-          <a:bodyPr rtlCol="0" anchor="ctr"/>
+          <a:bodyPr rtlCol="0" anchor="ctr" lIns="0" rIns="0" tIns="0" bIns="0" wrap="square"/>
           <a:lstStyle/>
           <a:p>
             <a:pPr algn="ctr"/>
-          </a:p>
-        </p:txBody>
-      </p:sp>
-      <p:sp>
-        <p:nvSpPr>
-          <p:cNvPr id="6" name="TextBox 5"/>
+            <a:r>
+              <a:rPr sz="1300" b="1" i="0">
+                <a:solidFill>
+                  <a:srgbClr val="FFFFFF"/>
+                </a:solidFill>
+                <a:latin typeface="Arial"/>
+              </a:rPr>
+              <a:t>1</a:t>
+            </a:r>
+          </a:p>
+        </p:txBody>
+      </p:sp>
+      <p:sp>
+        <p:nvSpPr>
+          <p:cNvPr id="5" name="TextBox 4"/>
           <p:cNvSpPr txBox="1"/>
           <p:nvPr/>
         </p:nvSpPr>
         <p:spPr>
           <a:xfrm>
-            <a:off x="658368" y="2537460"/>
-            <a:ext cx="10984687" cy="1028699"/>
+            <a:off x="1115568" y="1463040"/>
+            <a:ext cx="10527487" cy="1386839"/>
           </a:xfrm>
           <a:prstGeom prst="rect">
             <a:avLst/>
@@ -13352,7 +12961,7 @@
                 </a:solidFill>
                 <a:latin typeface="Arial"/>
               </a:rPr>
-              <a:t>What a pass looks like for each</a:t>
+              <a:t>The published framework</a:t>
             </a:r>
           </a:p>
           <a:p>
@@ -13368,20 +12977,20 @@
                 </a:solidFill>
                 <a:latin typeface="Arial"/>
               </a:rPr>
-              <a:t>So the gate is a test, not an opinion.</a:t>
-            </a:r>
-          </a:p>
-        </p:txBody>
-      </p:sp>
-      <p:sp>
-        <p:nvSpPr>
-          <p:cNvPr id="7" name="Rectangle 6"/>
+              <a:t>What to do — the phases, the principles, the deliverables.</a:t>
+            </a:r>
+          </a:p>
+        </p:txBody>
+      </p:sp>
+      <p:sp>
+        <p:nvSpPr>
+          <p:cNvPr id="6" name="Rectangle 5"/>
           <p:cNvSpPr/>
           <p:nvPr/>
         </p:nvSpPr>
         <p:spPr>
           <a:xfrm>
-            <a:off x="621792" y="3570732"/>
+            <a:off x="621792" y="2854452"/>
             <a:ext cx="10881360" cy="12700"/>
           </a:xfrm>
           <a:prstGeom prst="rect">
@@ -13419,75 +13028,20 @@
       </p:sp>
       <p:sp>
         <p:nvSpPr>
-          <p:cNvPr id="8" name="TextBox 7"/>
-          <p:cNvSpPr txBox="1"/>
-          <p:nvPr/>
-        </p:nvSpPr>
-        <p:spPr>
-          <a:xfrm>
-            <a:off x="658368" y="3611879"/>
-            <a:ext cx="10984687" cy="1028699"/>
-          </a:xfrm>
-          <a:prstGeom prst="rect">
-            <a:avLst/>
-          </a:prstGeom>
-          <a:noFill/>
-        </p:spPr>
-        <p:txBody>
-          <a:bodyPr wrap="square">
-            <a:spAutoFit/>
-          </a:bodyPr>
-          <a:lstStyle/>
-          <a:p>
-            <a:pPr>
-              <a:spcAft>
-                <a:spcPts val="300"/>
-              </a:spcAft>
-            </a:pPr>
-            <a:r>
-              <a:rPr sz="1900" b="1" i="0">
-                <a:solidFill>
-                  <a:srgbClr val="1A1A1A"/>
-                </a:solidFill>
-                <a:latin typeface="Arial"/>
-              </a:rPr>
-              <a:t>An exception form with a sunset date</a:t>
-            </a:r>
-          </a:p>
-          <a:p>
-            <a:pPr>
-              <a:spcAft>
-                <a:spcPts val="300"/>
-              </a:spcAft>
-            </a:pPr>
-            <a:r>
-              <a:rPr sz="1550" b="0" i="0">
-                <a:solidFill>
-                  <a:srgbClr val="595959"/>
-                </a:solidFill>
-                <a:latin typeface="Arial"/>
-              </a:rPr>
-              <a:t>Exceptions are granted in writing, and they expire.</a:t>
-            </a:r>
-          </a:p>
-        </p:txBody>
-      </p:sp>
-      <p:sp>
-        <p:nvSpPr>
-          <p:cNvPr id="9" name="Rectangle 8"/>
+          <p:cNvPr id="7" name="Oval 6"/>
           <p:cNvSpPr/>
           <p:nvPr/>
         </p:nvSpPr>
         <p:spPr>
           <a:xfrm>
-            <a:off x="621792" y="4645152"/>
-            <a:ext cx="10881360" cy="12700"/>
-          </a:xfrm>
-          <a:prstGeom prst="rect">
+            <a:off x="621792" y="2941319"/>
+            <a:ext cx="310896" cy="310896"/>
+          </a:xfrm>
+          <a:prstGeom prst="ellipse">
             <a:avLst/>
           </a:prstGeom>
           <a:solidFill>
-            <a:srgbClr val="DDECF4"/>
+            <a:srgbClr val="009CD6"/>
           </a:solidFill>
           <a:ln>
             <a:noFill/>
@@ -13509,23 +13063,32 @@
           </a:fontRef>
         </p:style>
         <p:txBody>
-          <a:bodyPr rtlCol="0" anchor="ctr"/>
+          <a:bodyPr rtlCol="0" anchor="ctr" lIns="0" rIns="0" tIns="0" bIns="0" wrap="square"/>
           <a:lstStyle/>
           <a:p>
             <a:pPr algn="ctr"/>
-          </a:p>
-        </p:txBody>
-      </p:sp>
-      <p:sp>
-        <p:nvSpPr>
-          <p:cNvPr id="10" name="TextBox 9"/>
+            <a:r>
+              <a:rPr sz="1300" b="1" i="0">
+                <a:solidFill>
+                  <a:srgbClr val="FFFFFF"/>
+                </a:solidFill>
+                <a:latin typeface="Arial"/>
+              </a:rPr>
+              <a:t>2</a:t>
+            </a:r>
+          </a:p>
+        </p:txBody>
+      </p:sp>
+      <p:sp>
+        <p:nvSpPr>
+          <p:cNvPr id="8" name="TextBox 7"/>
           <p:cNvSpPr txBox="1"/>
           <p:nvPr/>
         </p:nvSpPr>
         <p:spPr>
           <a:xfrm>
-            <a:off x="658368" y="4686300"/>
-            <a:ext cx="10984687" cy="1028699"/>
+            <a:off x="1115568" y="2895600"/>
+            <a:ext cx="10527487" cy="1386839"/>
           </a:xfrm>
           <a:prstGeom prst="rect">
             <a:avLst/>
@@ -13550,7 +13113,7 @@
                 </a:solidFill>
                 <a:latin typeface="Arial"/>
               </a:rPr>
-              <a:t>The decision-log fields</a:t>
+              <a:t>The worked examples and the AI plays</a:t>
             </a:r>
           </a:p>
           <a:p>
@@ -13566,7 +13129,104 @@
                 </a:solidFill>
                 <a:latin typeface="Arial"/>
               </a:rPr>
-              <a:t>What was decided, and why.</a:t>
+              <a:t>How to do it faster — a method turned into a draft in minutes.</a:t>
+            </a:r>
+          </a:p>
+        </p:txBody>
+      </p:sp>
+      <p:sp>
+        <p:nvSpPr>
+          <p:cNvPr id="9" name="Rectangle 8"/>
+          <p:cNvSpPr/>
+          <p:nvPr/>
+        </p:nvSpPr>
+        <p:spPr>
+          <a:xfrm>
+            <a:off x="621792" y="4287011"/>
+            <a:ext cx="10881360" cy="12700"/>
+          </a:xfrm>
+          <a:prstGeom prst="rect">
+            <a:avLst/>
+          </a:prstGeom>
+          <a:solidFill>
+            <a:srgbClr val="DDECF4"/>
+          </a:solidFill>
+          <a:ln>
+            <a:noFill/>
+          </a:ln>
+          <a:effectLst/>
+        </p:spPr>
+        <p:style>
+          <a:lnRef idx="1">
+            <a:schemeClr val="accent1"/>
+          </a:lnRef>
+          <a:fillRef idx="3">
+            <a:schemeClr val="accent1"/>
+          </a:fillRef>
+          <a:effectRef idx="2">
+            <a:schemeClr val="accent1"/>
+          </a:effectRef>
+          <a:fontRef idx="minor">
+            <a:schemeClr val="lt1"/>
+          </a:fontRef>
+        </p:style>
+        <p:txBody>
+          <a:bodyPr rtlCol="0" anchor="ctr"/>
+          <a:lstStyle/>
+          <a:p>
+            <a:pPr algn="ctr"/>
+          </a:p>
+        </p:txBody>
+      </p:sp>
+      <p:sp>
+        <p:nvSpPr>
+          <p:cNvPr id="10" name="Oval 9"/>
+          <p:cNvSpPr/>
+          <p:nvPr/>
+        </p:nvSpPr>
+        <p:spPr>
+          <a:xfrm>
+            <a:off x="621792" y="4373879"/>
+            <a:ext cx="310896" cy="310896"/>
+          </a:xfrm>
+          <a:prstGeom prst="ellipse">
+            <a:avLst/>
+          </a:prstGeom>
+          <a:solidFill>
+            <a:srgbClr val="009CD6"/>
+          </a:solidFill>
+          <a:ln>
+            <a:noFill/>
+          </a:ln>
+          <a:effectLst/>
+        </p:spPr>
+        <p:style>
+          <a:lnRef idx="1">
+            <a:schemeClr val="accent1"/>
+          </a:lnRef>
+          <a:fillRef idx="3">
+            <a:schemeClr val="accent1"/>
+          </a:fillRef>
+          <a:effectRef idx="2">
+            <a:schemeClr val="accent1"/>
+          </a:effectRef>
+          <a:fontRef idx="minor">
+            <a:schemeClr val="lt1"/>
+          </a:fontRef>
+        </p:style>
+        <p:txBody>
+          <a:bodyPr rtlCol="0" anchor="ctr" lIns="0" rIns="0" tIns="0" bIns="0" wrap="square"/>
+          <a:lstStyle/>
+          <a:p>
+            <a:pPr algn="ctr"/>
+            <a:r>
+              <a:rPr sz="1300" b="1" i="0">
+                <a:solidFill>
+                  <a:srgbClr val="FFFFFF"/>
+                </a:solidFill>
+                <a:latin typeface="Arial"/>
+              </a:rPr>
+              <a:t>3</a:t>
             </a:r>
           </a:p>
         </p:txBody>
@@ -13574,6 +13234,61 @@
       <p:sp>
         <p:nvSpPr>
           <p:cNvPr id="11" name="TextBox 10"/>
+          <p:cNvSpPr txBox="1"/>
+          <p:nvPr/>
+        </p:nvSpPr>
+        <p:spPr>
+          <a:xfrm>
+            <a:off x="1115568" y="4328159"/>
+            <a:ext cx="10527487" cy="1386839"/>
+          </a:xfrm>
+          <a:prstGeom prst="rect">
+            <a:avLst/>
+          </a:prstGeom>
+          <a:noFill/>
+        </p:spPr>
+        <p:txBody>
+          <a:bodyPr wrap="square">
+            <a:spAutoFit/>
+          </a:bodyPr>
+          <a:lstStyle/>
+          <a:p>
+            <a:pPr>
+              <a:spcAft>
+                <a:spcPts val="300"/>
+              </a:spcAft>
+            </a:pPr>
+            <a:r>
+              <a:rPr sz="1900" b="1" i="0">
+                <a:solidFill>
+                  <a:srgbClr val="1A1A1A"/>
+                </a:solidFill>
+                <a:latin typeface="Arial"/>
+              </a:rPr>
+              <a:t>The community of countries and partners</a:t>
+            </a:r>
+          </a:p>
+          <a:p>
+            <a:pPr>
+              <a:spcAft>
+                <a:spcPts val="300"/>
+              </a:spcAft>
+            </a:pPr>
+            <a:r>
+              <a:rPr sz="1550" b="0" i="0">
+                <a:solidFill>
+                  <a:srgbClr val="595959"/>
+                </a:solidFill>
+                <a:latin typeface="Arial"/>
+              </a:rPr>
+              <a:t>Who to ask when your team is stuck.</a:t>
+            </a:r>
+          </a:p>
+        </p:txBody>
+      </p:sp>
+      <p:sp>
+        <p:nvSpPr>
+          <p:cNvPr id="12" name="TextBox 11"/>
           <p:cNvSpPr txBox="1"/>
           <p:nvPr/>
         </p:nvSpPr>
@@ -13600,14 +13315,14 @@
                 </a:solidFill>
                 <a:latin typeface="Arial"/>
               </a:rPr>
-              <a:t>Give it your adopted principles and your shared blocks; get a working draft in minutes.</a:t>
-            </a:r>
-          </a:p>
-        </p:txBody>
-      </p:sp>
-      <p:sp>
-        <p:nvSpPr>
-          <p:cNvPr id="12" name="TextBox 11"/>
+              <a:t>You are not equipping your team alone. You are connecting them to a network.</a:t>
+            </a:r>
+          </a:p>
+        </p:txBody>
+      </p:sp>
+      <p:sp>
+        <p:nvSpPr>
+          <p:cNvPr id="13" name="TextBox 12"/>
           <p:cNvSpPr txBox="1"/>
           <p:nvPr/>
         </p:nvSpPr>
@@ -13634,7 +13349,7 @@
                 </a:solidFill>
                 <a:latin typeface="Arial"/>
               </a:rPr>
-              <a:t>5.5 · Play 4 — Draft your governance artefacts</a:t>
+              <a:t>5.5 · Build your team's capability with open knowledge products</a:t>
             </a:r>
           </a:p>
         </p:txBody>
@@ -13730,25 +13445,80 @@
                 </a:solidFill>
                 <a:latin typeface="Arial"/>
               </a:rPr>
-              <a:t>The gate-decision paper — arrive prepared, and let the Board rule</a:t>
-            </a:r>
-          </a:p>
-        </p:txBody>
-      </p:sp>
-      <p:sp>
-        <p:nvSpPr>
-          <p:cNvPr id="4" name="Rounded Rectangle 3"/>
+              <a:t>What you actually need to fund is time, not invention</a:t>
+            </a:r>
+          </a:p>
+        </p:txBody>
+      </p:sp>
+      <p:sp>
+        <p:nvSpPr>
+          <p:cNvPr id="4" name="TextBox 3"/>
+          <p:cNvSpPr txBox="1"/>
+          <p:nvPr/>
+        </p:nvSpPr>
+        <p:spPr>
+          <a:xfrm>
+            <a:off x="658368" y="1600200"/>
+            <a:ext cx="10881360" cy="2651760"/>
+          </a:xfrm>
+          <a:prstGeom prst="rect">
+            <a:avLst/>
+          </a:prstGeom>
+          <a:noFill/>
+        </p:spPr>
+        <p:txBody>
+          <a:bodyPr wrap="square">
+            <a:spAutoFit/>
+          </a:bodyPr>
+          <a:lstStyle/>
+          <a:p>
+            <a:pPr>
+              <a:spcAft>
+                <a:spcPts val="1200"/>
+              </a:spcAft>
+            </a:pPr>
+            <a:r>
+              <a:rPr sz="2000" b="0" i="0">
+                <a:solidFill>
+                  <a:srgbClr val="1A1A1A"/>
+                </a:solidFill>
+                <a:latin typeface="Arial"/>
+              </a:rPr>
+              <a:t>Not the invention of a method — that exists. You fund a small team given the time to learn it and apply it to your country, and access to the materials and the community.</a:t>
+            </a:r>
+          </a:p>
+          <a:p>
+            <a:pPr>
+              <a:spcAft>
+                <a:spcPts val="1200"/>
+              </a:spcAft>
+            </a:pPr>
+            <a:r>
+              <a:rPr sz="2000" b="0" i="0">
+                <a:solidFill>
+                  <a:srgbClr val="1A1A1A"/>
+                </a:solidFill>
+                <a:latin typeface="Arial"/>
+              </a:rPr>
+              <a:t>The expensive thing — decades of accumulated knowledge about what works in public-sector architecture — you get for the cost of learning it, not the cost of discovering it.</a:t>
+            </a:r>
+          </a:p>
+        </p:txBody>
+      </p:sp>
+      <p:sp>
+        <p:nvSpPr>
+          <p:cNvPr id="5" name="Rounded Rectangle 4"/>
           <p:cNvSpPr/>
           <p:nvPr/>
         </p:nvSpPr>
         <p:spPr>
           <a:xfrm>
-            <a:off x="658368" y="1645920"/>
-            <a:ext cx="3246120" cy="3840480"/>
+            <a:off x="658368" y="4434840"/>
+            <a:ext cx="10881360" cy="1325880"/>
           </a:xfrm>
           <a:prstGeom prst="roundRect">
             <a:avLst>
-              <a:gd name="adj" fmla="val 8000"/>
+              <a:gd name="adj" fmla="val 4500"/>
             </a:avLst>
           </a:prstGeom>
           <a:solidFill>
@@ -13774,365 +13544,55 @@
           </a:fontRef>
         </p:style>
         <p:txBody>
-          <a:bodyPr rtlCol="0" anchor="t" lIns="128016" rIns="128016" tIns="91440" bIns="54864" wrap="square"/>
+          <a:bodyPr rtlCol="0" anchor="ctr"/>
           <a:lstStyle/>
           <a:p>
-            <a:pPr algn="l">
+            <a:pPr algn="ctr"/>
+          </a:p>
+        </p:txBody>
+      </p:sp>
+      <p:sp>
+        <p:nvSpPr>
+          <p:cNvPr id="6" name="TextBox 5"/>
+          <p:cNvSpPr txBox="1"/>
+          <p:nvPr/>
+        </p:nvSpPr>
+        <p:spPr>
+          <a:xfrm>
+            <a:off x="859536" y="4626864"/>
+            <a:ext cx="10479024" cy="1051560"/>
+          </a:xfrm>
+          <a:prstGeom prst="rect">
+            <a:avLst/>
+          </a:prstGeom>
+          <a:noFill/>
+        </p:spPr>
+        <p:txBody>
+          <a:bodyPr wrap="square">
+            <a:spAutoFit/>
+          </a:bodyPr>
+          <a:lstStyle/>
+          <a:p>
+            <a:pPr>
               <a:spcAft>
-                <a:spcPts val="300"/>
+                <a:spcPts val="700"/>
               </a:spcAft>
             </a:pPr>
             <a:r>
-              <a:rPr sz="1200" b="1" i="0">
+              <a:rPr sz="2300" b="1" i="0">
                 <a:solidFill>
                   <a:srgbClr val="006E96"/>
                 </a:solidFill>
                 <a:latin typeface="Arial"/>
               </a:rPr>
-              <a:t>YOU PASTE</a:t>
-            </a:r>
-          </a:p>
-          <a:p>
-            <a:pPr algn="l">
-              <a:spcAft>
-                <a:spcPts val="300"/>
-              </a:spcAft>
-            </a:pPr>
-            <a:r>
-              <a:rPr sz="1450" b="0" i="0">
-                <a:solidFill>
-                  <a:srgbClr val="1A1A1A"/>
-                </a:solidFill>
-                <a:latin typeface="Arial"/>
-              </a:rPr>
-              <a:t>A real project proposal.</a:t>
-            </a:r>
-          </a:p>
-          <a:p>
-            <a:pPr algn="l">
-              <a:spcAft>
-                <a:spcPts val="300"/>
-              </a:spcAft>
-            </a:pPr>
-            <a:r>
-              <a:rPr sz="1450" b="0" i="0">
-                <a:solidFill>
-                  <a:srgbClr val="1A1A1A"/>
-                </a:solidFill>
-                <a:latin typeface="Arial"/>
-              </a:rPr>
-              <a:t>The scholarship programme that wants its own learner list.</a:t>
-            </a:r>
-          </a:p>
-        </p:txBody>
-      </p:sp>
-      <p:sp>
-        <p:nvSpPr>
-          <p:cNvPr id="5" name="Rounded Rectangle 4"/>
-          <p:cNvSpPr/>
-          <p:nvPr/>
-        </p:nvSpPr>
-        <p:spPr>
-          <a:xfrm>
-            <a:off x="4471416" y="1645920"/>
-            <a:ext cx="3246120" cy="3840480"/>
-          </a:xfrm>
-          <a:prstGeom prst="roundRect">
-            <a:avLst>
-              <a:gd name="adj" fmla="val 8000"/>
-            </a:avLst>
-          </a:prstGeom>
-          <a:solidFill>
-            <a:srgbClr val="F2F2F2"/>
-          </a:solidFill>
-          <a:ln>
-            <a:noFill/>
-          </a:ln>
-          <a:effectLst/>
-        </p:spPr>
-        <p:style>
-          <a:lnRef idx="1">
-            <a:schemeClr val="accent1"/>
-          </a:lnRef>
-          <a:fillRef idx="3">
-            <a:schemeClr val="accent1"/>
-          </a:fillRef>
-          <a:effectRef idx="2">
-            <a:schemeClr val="accent1"/>
-          </a:effectRef>
-          <a:fontRef idx="minor">
-            <a:schemeClr val="lt1"/>
-          </a:fontRef>
-        </p:style>
-        <p:txBody>
-          <a:bodyPr rtlCol="0" anchor="t" lIns="128016" rIns="128016" tIns="91440" bIns="54864" wrap="square"/>
-          <a:lstStyle/>
-          <a:p>
-            <a:pPr algn="l">
-              <a:spcAft>
-                <a:spcPts val="300"/>
-              </a:spcAft>
-            </a:pPr>
-            <a:r>
-              <a:rPr sz="1200" b="1" i="0">
-                <a:solidFill>
-                  <a:srgbClr val="006E96"/>
-                </a:solidFill>
-                <a:latin typeface="Arial"/>
-              </a:rPr>
-              <a:t>THE AI RETURNS</a:t>
-            </a:r>
-          </a:p>
-          <a:p>
-            <a:pPr algn="l">
-              <a:spcAft>
-                <a:spcPts val="300"/>
-              </a:spcAft>
-            </a:pPr>
-            <a:r>
-              <a:rPr sz="1450" b="0" i="0">
-                <a:solidFill>
-                  <a:srgbClr val="1A1A1A"/>
-                </a:solidFill>
-                <a:latin typeface="Arial"/>
-              </a:rPr>
-              <a:t>The gate questions, answered.</a:t>
-            </a:r>
-          </a:p>
-          <a:p>
-            <a:pPr algn="l">
-              <a:spcAft>
-                <a:spcPts val="300"/>
-              </a:spcAft>
-            </a:pPr>
-            <a:r>
-              <a:rPr sz="1450" b="0" i="0">
-                <a:solidFill>
-                  <a:srgbClr val="1A1A1A"/>
-                </a:solidFill>
-                <a:latin typeface="Arial"/>
-              </a:rPr>
-              <a:t>A recommended ruling.</a:t>
-            </a:r>
-          </a:p>
-          <a:p>
-            <a:pPr algn="l">
-              <a:spcAft>
-                <a:spcPts val="300"/>
-              </a:spcAft>
-            </a:pPr>
-            <a:r>
-              <a:rPr sz="1450" b="0" i="0">
-                <a:solidFill>
-                  <a:srgbClr val="1A1A1A"/>
-                </a:solidFill>
-                <a:latin typeface="Arial"/>
-              </a:rPr>
-              <a:t>The decision-log entry.</a:t>
-            </a:r>
-          </a:p>
-        </p:txBody>
-      </p:sp>
-      <p:sp>
-        <p:nvSpPr>
-          <p:cNvPr id="6" name="Rounded Rectangle 5"/>
-          <p:cNvSpPr/>
-          <p:nvPr/>
-        </p:nvSpPr>
-        <p:spPr>
-          <a:xfrm>
-            <a:off x="8284464" y="1645920"/>
-            <a:ext cx="3246120" cy="3840480"/>
-          </a:xfrm>
-          <a:prstGeom prst="roundRect">
-            <a:avLst>
-              <a:gd name="adj" fmla="val 8000"/>
-            </a:avLst>
-          </a:prstGeom>
-          <a:solidFill>
-            <a:srgbClr val="006E96"/>
-          </a:solidFill>
-          <a:ln>
-            <a:noFill/>
-          </a:ln>
-          <a:effectLst/>
-        </p:spPr>
-        <p:style>
-          <a:lnRef idx="1">
-            <a:schemeClr val="accent1"/>
-          </a:lnRef>
-          <a:fillRef idx="3">
-            <a:schemeClr val="accent1"/>
-          </a:fillRef>
-          <a:effectRef idx="2">
-            <a:schemeClr val="accent1"/>
-          </a:effectRef>
-          <a:fontRef idx="minor">
-            <a:schemeClr val="lt1"/>
-          </a:fontRef>
-        </p:style>
-        <p:txBody>
-          <a:bodyPr rtlCol="0" anchor="t" lIns="128016" rIns="128016" tIns="91440" bIns="54864" wrap="square"/>
-          <a:lstStyle/>
-          <a:p>
-            <a:pPr algn="l">
-              <a:spcAft>
-                <a:spcPts val="300"/>
-              </a:spcAft>
-            </a:pPr>
-            <a:r>
-              <a:rPr sz="1200" b="1" i="0">
-                <a:solidFill>
-                  <a:srgbClr val="FFFFFF"/>
-                </a:solidFill>
-                <a:latin typeface="Arial"/>
-              </a:rPr>
-              <a:t>YOU DECIDE</a:t>
-            </a:r>
-          </a:p>
-          <a:p>
-            <a:pPr algn="l">
-              <a:spcAft>
-                <a:spcPts val="300"/>
-              </a:spcAft>
-            </a:pPr>
-            <a:r>
-              <a:rPr sz="1450" b="0" i="0">
-                <a:solidFill>
-                  <a:srgbClr val="FFFFFF"/>
-                </a:solidFill>
-                <a:latin typeface="Arial"/>
-              </a:rPr>
-              <a:t>The Board rules.</a:t>
-            </a:r>
-          </a:p>
-          <a:p>
-            <a:pPr algn="l">
-              <a:spcAft>
-                <a:spcPts val="300"/>
-              </a:spcAft>
-            </a:pPr>
-            <a:r>
-              <a:rPr sz="1450" b="0" i="0">
-                <a:solidFill>
-                  <a:srgbClr val="FFFFFF"/>
-                </a:solidFill>
-                <a:latin typeface="Arial"/>
-              </a:rPr>
-              <a:t>Consume the registry, or a time-boxed written exception.</a:t>
-            </a:r>
-          </a:p>
-        </p:txBody>
-      </p:sp>
-      <p:cxnSp>
-        <p:nvCxnSpPr>
-          <p:cNvPr id="7" name="Connector 6"/>
-          <p:cNvCxnSpPr/>
-          <p:nvPr/>
-        </p:nvCxnSpPr>
-        <p:spPr>
-          <a:xfrm>
-            <a:off x="3977639" y="3566160"/>
-            <a:ext cx="420625" cy="0"/>
-          </a:xfrm>
-          <a:prstGeom prst="line">
-            <a:avLst/>
-          </a:prstGeom>
-          <a:ln w="25400">
-            <a:solidFill>
-              <a:srgbClr val="006E96"/>
-            </a:solidFill>
-            <a:tailEnd type="triangle" w="med" len="med"/>
-          </a:ln>
-        </p:spPr>
-        <p:style>
-          <a:lnRef idx="2">
-            <a:schemeClr val="accent1"/>
-          </a:lnRef>
-          <a:fillRef idx="0">
-            <a:schemeClr val="accent1"/>
-          </a:fillRef>
-          <a:effectRef idx="1">
-            <a:schemeClr val="accent1"/>
-          </a:effectRef>
-          <a:fontRef idx="minor">
-            <a:schemeClr val="tx1"/>
-          </a:fontRef>
-        </p:style>
-      </p:cxnSp>
-      <p:cxnSp>
-        <p:nvCxnSpPr>
-          <p:cNvPr id="8" name="Connector 7"/>
-          <p:cNvCxnSpPr/>
-          <p:nvPr/>
-        </p:nvCxnSpPr>
-        <p:spPr>
-          <a:xfrm>
-            <a:off x="7790688" y="3566160"/>
-            <a:ext cx="420624" cy="0"/>
-          </a:xfrm>
-          <a:prstGeom prst="line">
-            <a:avLst/>
-          </a:prstGeom>
-          <a:ln w="25400">
-            <a:solidFill>
-              <a:srgbClr val="006E96"/>
-            </a:solidFill>
-            <a:tailEnd type="triangle" w="med" len="med"/>
-          </a:ln>
-        </p:spPr>
-        <p:style>
-          <a:lnRef idx="2">
-            <a:schemeClr val="accent1"/>
-          </a:lnRef>
-          <a:fillRef idx="0">
-            <a:schemeClr val="accent1"/>
-          </a:fillRef>
-          <a:effectRef idx="1">
-            <a:schemeClr val="accent1"/>
-          </a:effectRef>
-          <a:fontRef idx="minor">
-            <a:schemeClr val="tx1"/>
-          </a:fontRef>
-        </p:style>
-      </p:cxnSp>
-      <p:sp>
-        <p:nvSpPr>
-          <p:cNvPr id="9" name="TextBox 8"/>
-          <p:cNvSpPr txBox="1"/>
-          <p:nvPr/>
-        </p:nvSpPr>
-        <p:spPr>
-          <a:xfrm>
-            <a:off x="658368" y="5760720"/>
-            <a:ext cx="10881360" cy="548640"/>
-          </a:xfrm>
-          <a:prstGeom prst="rect">
-            <a:avLst/>
-          </a:prstGeom>
-          <a:noFill/>
-        </p:spPr>
-        <p:txBody>
-          <a:bodyPr wrap="square">
-            <a:spAutoFit/>
-          </a:bodyPr>
-          <a:lstStyle/>
-          <a:p>
-            <a:r>
-              <a:rPr sz="1550" b="1" i="0">
-                <a:solidFill>
-                  <a:srgbClr val="006E96"/>
-                </a:solidFill>
-                <a:latin typeface="Arial"/>
-              </a:rPr>
-              <a:t>The Board still rules — on a structured paper, not an argument made on the spot.</a:t>
-            </a:r>
-          </a:p>
-        </p:txBody>
-      </p:sp>
-      <p:sp>
-        <p:nvSpPr>
-          <p:cNvPr id="10" name="TextBox 9"/>
+              <a:t>Fund a team to apply a proven method, not consultants to invent one.</a:t>
+            </a:r>
+          </a:p>
+        </p:txBody>
+      </p:sp>
+      <p:sp>
+        <p:nvSpPr>
+          <p:cNvPr id="7" name="TextBox 6"/>
           <p:cNvSpPr txBox="1"/>
           <p:nvPr/>
         </p:nvSpPr>
@@ -14159,7 +13619,7 @@
                 </a:solidFill>
                 <a:latin typeface="Arial"/>
               </a:rPr>
-              <a:t>5.5 · Play 4 — Draft your governance artefacts</a:t>
+              <a:t>5.5 · Build your team's capability with open knowledge products</a:t>
             </a:r>
           </a:p>
         </p:txBody>
@@ -14255,7 +13715,7 @@
                 </a:solidFill>
                 <a:latin typeface="Arial"/>
               </a:rPr>
-              <a:t>A Board claiming authority it does not legally hold is overruled on first test</a:t>
+              <a:t>Build the capability in your own people</a:t>
             </a:r>
           </a:p>
         </p:txBody>
@@ -14269,7 +13729,7 @@
         <p:spPr>
           <a:xfrm>
             <a:off x="658368" y="1600200"/>
-            <a:ext cx="10881360" cy="1984248"/>
+            <a:ext cx="10881360" cy="2651760"/>
           </a:xfrm>
           <a:prstGeom prst="rect">
             <a:avLst/>
@@ -14294,7 +13754,7 @@
                 </a:solidFill>
                 <a:latin typeface="Arial"/>
               </a:rPr>
-              <a:t>The documents this play drafts are institutional, and some of them — especially the Board's binding decision scope — interact with your country's laws. The AI draft is a starting point for your legal counsel, never the final text.</a:t>
+              <a:t>Open knowledge products let you build the capability inside your own institutions — architects who learn the method, apply it, and stay — instead of expertise that walks out of the door when a contract ends.</a:t>
             </a:r>
           </a:p>
           <a:p>
@@ -14310,7 +13770,7 @@
                 </a:solidFill>
                 <a:latin typeface="Arial"/>
               </a:rPr>
-              <a:t>The first time a powerful ministry tests an authority the Board does not have, the overrule sets a precedent that is hard to undo.</a:t>
+              <a:t>A strategist's quiet goal in all of this is a national capability that outlasts any single contract or consultant.</a:t>
             </a:r>
           </a:p>
         </p:txBody>
@@ -14323,7 +13783,7 @@
         </p:nvSpPr>
         <p:spPr>
           <a:xfrm>
-            <a:off x="658368" y="3767328"/>
+            <a:off x="658368" y="4434840"/>
             <a:ext cx="10881360" cy="1325880"/>
           </a:xfrm>
           <a:prstGeom prst="roundRect">
@@ -14369,7 +13829,7 @@
         </p:nvSpPr>
         <p:spPr>
           <a:xfrm>
-            <a:off x="859536" y="3959352"/>
+            <a:off x="859536" y="4626864"/>
             <a:ext cx="10479024" cy="1051560"/>
           </a:xfrm>
           <a:prstGeom prst="rect">
@@ -14395,7 +13855,7 @@
                 </a:solidFill>
                 <a:latin typeface="Arial"/>
               </a:rPr>
-              <a:t>Draft fast with the play. Ratify slowly, with counsel.</a:t>
+              <a:t>Open knowledge products are how you build it in your own people.</a:t>
             </a:r>
           </a:p>
         </p:txBody>
@@ -14429,7 +13889,7 @@
                 </a:solidFill>
                 <a:latin typeface="Arial"/>
               </a:rPr>
-              <a:t>5.5 · Play 4 — Draft your governance artefacts</a:t>
+              <a:t>5.5 · Build your team's capability with open knowledge products</a:t>
             </a:r>
           </a:p>
         </p:txBody>
@@ -14481,7 +13941,7 @@
                 </a:solidFill>
                 <a:latin typeface="Arial"/>
               </a:rPr>
-              <a:t>This play drafts the Board terms of reference, the review-gate checklist and the gate-decision paper — so governance arrives as a strong draft to edit, with legal review before anything is adopted.</a:t>
+              <a:t>The method, the framework and the training already exist as open knowledge products — so fund a small team to learn and apply them, not consultants to reinvent them, and build the capability in your own people.</a:t>
             </a:r>
           </a:p>
         </p:txBody>
@@ -14549,7 +14009,7 @@
                 </a:solidFill>
                 <a:latin typeface="Arial"/>
               </a:rPr>
-              <a:t>5.5 · Play 4 — Draft your governance artefacts</a:t>
+              <a:t>5.5 · Build your team's capability with open knowledge products</a:t>
             </a:r>
           </a:p>
         </p:txBody>
@@ -14719,7 +14179,7 @@
                 </a:solidFill>
                 <a:latin typeface="Arial"/>
               </a:rPr>
-              <a:t>•  PAERA v1.0 — §4.2.1 (Management)</a:t>
+              <a:t>•  PAERA v1.0 — §4.5 (Digital Co-creation)</a:t>
             </a:r>
           </a:p>
           <a:p>
@@ -14735,7 +14195,23 @@
                 </a:solidFill>
                 <a:latin typeface="Arial"/>
               </a:rPr>
-              <a:t>•  PAERA v1.0 — §5.4 (Organisational Assessment &amp; Roadmap)</a:t>
+              <a:t>•  PAERA v1.0 — §1.3 (GovStack Vision)</a:t>
+            </a:r>
+          </a:p>
+          <a:p>
+            <a:pPr>
+              <a:spcAft>
+                <a:spcPts val="1200"/>
+              </a:spcAft>
+            </a:pPr>
+            <a:r>
+              <a:rPr sz="1700" b="0" i="0">
+                <a:solidFill>
+                  <a:srgbClr val="1A1A1A"/>
+                </a:solidFill>
+                <a:latin typeface="Arial"/>
+              </a:rPr>
+              <a:t>•  GovStack knowledge base — govstack.global</a:t>
             </a:r>
           </a:p>
         </p:txBody>
@@ -14803,7 +14279,7 @@
                 </a:solidFill>
                 <a:latin typeface="Arial"/>
               </a:rPr>
-              <a:t>5.5 · Play 4 — Draft your governance artefacts</a:t>
+              <a:t>5.5 · Build your team's capability with open knowledge products</a:t>
             </a:r>
           </a:p>
         </p:txBody>
